--- a/ClasesPPTX/W05B.pptx
+++ b/ClasesPPTX/W05B.pptx
@@ -6523,7 +6523,7 @@
           <a:p>
             <a:fld id="{AE30F58D-5E2D-4C68-86B1-38007151CBCD}" type="datetimeFigureOut">
               <a:rPr lang="es-CO" smtClean="0"/>
-              <a:t>15/02/2026</a:t>
+              <a:t>1/03/2026</a:t>
             </a:fld>
             <a:endParaRPr lang="es-CO"/>
           </a:p>
@@ -7571,7 +7571,7 @@
           <a:p>
             <a:fld id="{21049A4E-D804-428F-9A93-E9A506C56988}" type="datetimeFigureOut">
               <a:rPr lang="es-CO" smtClean="0"/>
-              <a:t>15/02/2026</a:t>
+              <a:t>1/03/2026</a:t>
             </a:fld>
             <a:endParaRPr lang="es-CO"/>
           </a:p>
@@ -7771,7 +7771,7 @@
           <a:p>
             <a:fld id="{21049A4E-D804-428F-9A93-E9A506C56988}" type="datetimeFigureOut">
               <a:rPr lang="es-CO" smtClean="0"/>
-              <a:t>15/02/2026</a:t>
+              <a:t>1/03/2026</a:t>
             </a:fld>
             <a:endParaRPr lang="es-CO"/>
           </a:p>
@@ -7981,7 +7981,7 @@
           <a:p>
             <a:fld id="{21049A4E-D804-428F-9A93-E9A506C56988}" type="datetimeFigureOut">
               <a:rPr lang="es-CO" smtClean="0"/>
-              <a:t>15/02/2026</a:t>
+              <a:t>1/03/2026</a:t>
             </a:fld>
             <a:endParaRPr lang="es-CO"/>
           </a:p>
@@ -8181,7 +8181,7 @@
           <a:p>
             <a:fld id="{21049A4E-D804-428F-9A93-E9A506C56988}" type="datetimeFigureOut">
               <a:rPr lang="es-CO" smtClean="0"/>
-              <a:t>15/02/2026</a:t>
+              <a:t>1/03/2026</a:t>
             </a:fld>
             <a:endParaRPr lang="es-CO"/>
           </a:p>
@@ -8457,7 +8457,7 @@
           <a:p>
             <a:fld id="{21049A4E-D804-428F-9A93-E9A506C56988}" type="datetimeFigureOut">
               <a:rPr lang="es-CO" smtClean="0"/>
-              <a:t>15/02/2026</a:t>
+              <a:t>1/03/2026</a:t>
             </a:fld>
             <a:endParaRPr lang="es-CO"/>
           </a:p>
@@ -8725,7 +8725,7 @@
           <a:p>
             <a:fld id="{21049A4E-D804-428F-9A93-E9A506C56988}" type="datetimeFigureOut">
               <a:rPr lang="es-CO" smtClean="0"/>
-              <a:t>15/02/2026</a:t>
+              <a:t>1/03/2026</a:t>
             </a:fld>
             <a:endParaRPr lang="es-CO"/>
           </a:p>
@@ -9140,7 +9140,7 @@
           <a:p>
             <a:fld id="{21049A4E-D804-428F-9A93-E9A506C56988}" type="datetimeFigureOut">
               <a:rPr lang="es-CO" smtClean="0"/>
-              <a:t>15/02/2026</a:t>
+              <a:t>1/03/2026</a:t>
             </a:fld>
             <a:endParaRPr lang="es-CO"/>
           </a:p>
@@ -9282,7 +9282,7 @@
           <a:p>
             <a:fld id="{21049A4E-D804-428F-9A93-E9A506C56988}" type="datetimeFigureOut">
               <a:rPr lang="es-CO" smtClean="0"/>
-              <a:t>15/02/2026</a:t>
+              <a:t>1/03/2026</a:t>
             </a:fld>
             <a:endParaRPr lang="es-CO"/>
           </a:p>
@@ -9395,7 +9395,7 @@
           <a:p>
             <a:fld id="{21049A4E-D804-428F-9A93-E9A506C56988}" type="datetimeFigureOut">
               <a:rPr lang="es-CO" smtClean="0"/>
-              <a:t>15/02/2026</a:t>
+              <a:t>1/03/2026</a:t>
             </a:fld>
             <a:endParaRPr lang="es-CO"/>
           </a:p>
@@ -9708,7 +9708,7 @@
           <a:p>
             <a:fld id="{21049A4E-D804-428F-9A93-E9A506C56988}" type="datetimeFigureOut">
               <a:rPr lang="es-CO" smtClean="0"/>
-              <a:t>15/02/2026</a:t>
+              <a:t>1/03/2026</a:t>
             </a:fld>
             <a:endParaRPr lang="es-CO"/>
           </a:p>
@@ -9997,7 +9997,7 @@
           <a:p>
             <a:fld id="{21049A4E-D804-428F-9A93-E9A506C56988}" type="datetimeFigureOut">
               <a:rPr lang="es-CO" smtClean="0"/>
-              <a:t>15/02/2026</a:t>
+              <a:t>1/03/2026</a:t>
             </a:fld>
             <a:endParaRPr lang="es-CO"/>
           </a:p>
@@ -10240,7 +10240,7 @@
           <a:p>
             <a:fld id="{21049A4E-D804-428F-9A93-E9A506C56988}" type="datetimeFigureOut">
               <a:rPr lang="es-CO" smtClean="0"/>
-              <a:t>15/02/2026</a:t>
+              <a:t>1/03/2026</a:t>
             </a:fld>
             <a:endParaRPr lang="es-CO"/>
           </a:p>
@@ -32811,21 +32811,25 @@
             <a:pPr lvl="1"/>
             <a:r>
               <a:rPr lang="es-ES" sz="2000" dirty="0"/>
-              <a:t>W03B: Silver/Gold (tablas estables)</a:t>
+              <a:t>W04B: Silver/Gold (tablas estables)</a:t>
             </a:r>
           </a:p>
           <a:p>
             <a:pPr lvl="1"/>
             <a:r>
               <a:rPr lang="es-ES" sz="2000" dirty="0"/>
-              <a:t>W04A: leer planes</a:t>
+              <a:t>W05A: leer planes</a:t>
             </a:r>
           </a:p>
           <a:p>
             <a:pPr lvl="1"/>
             <a:r>
+              <a:rPr lang="es-ES" sz="2000" b="1"/>
+              <a:t>W05B</a:t>
+            </a:r>
+            <a:r>
               <a:rPr lang="es-ES" sz="2000" b="1" dirty="0"/>
-              <a:t>W04B: experimentar con orden + índices</a:t>
+              <a:t>: experimentar con orden + índices</a:t>
             </a:r>
             <a:endParaRPr lang="es-ES" sz="2000" dirty="0"/>
           </a:p>
